--- a/dapan/nangcao/Cau_01.pptx
+++ b/dapan/nangcao/Cau_01.pptx
@@ -1229,7 +1229,7 @@
           <a:p>
             <a:fld id="{31CB1D12-8C61-4E0E-AB82-FA3FABAC0DB6}" type="datetimeFigureOut">
               <a:rPr lang="en-US" smtClean="0"/>
-              <a:t>4/5/2026</a:t>
+              <a:t>4/18/2026</a:t>
             </a:fld>
             <a:endParaRPr lang="en-US"/>
           </a:p>
@@ -1607,7 +1607,7 @@
             <a:pPr algn="ctr"/>
             <a:fld id="{3A7274D6-7D17-48C3-9B7F-E624F1DDE9E1}" type="datetime1">
               <a:rPr lang="en-US" smtClean="0"/>
-              <a:t>4/5/2026</a:t>
+              <a:t>4/18/2026</a:t>
             </a:fld>
             <a:endParaRPr lang="en-US" dirty="0"/>
           </a:p>
@@ -1913,7 +1913,7 @@
           <a:p>
             <a:fld id="{EF92FB22-7558-4975-95BC-1A00029BF016}" type="datetime1">
               <a:rPr lang="en-US" smtClean="0"/>
-              <a:t>4/5/2026</a:t>
+              <a:t>4/18/2026</a:t>
             </a:fld>
             <a:endParaRPr lang="en-US"/>
           </a:p>
@@ -2087,7 +2087,7 @@
           <a:p>
             <a:fld id="{A8CB6CA0-CA93-4CD6-ABCD-6223D456C58E}" type="datetime1">
               <a:rPr lang="en-US" smtClean="0"/>
-              <a:t>4/5/2026</a:t>
+              <a:t>4/18/2026</a:t>
             </a:fld>
             <a:endParaRPr lang="en-US"/>
           </a:p>
@@ -2271,7 +2271,7 @@
           <a:p>
             <a:fld id="{6647FE44-E766-46FC-9BDB-DFA279909057}" type="datetime1">
               <a:rPr lang="en-US" smtClean="0"/>
-              <a:t>4/5/2026</a:t>
+              <a:t>4/18/2026</a:t>
             </a:fld>
             <a:endParaRPr lang="en-US"/>
           </a:p>
@@ -2485,7 +2485,7 @@
           <a:p>
             <a:fld id="{4B705297-F186-4D20-AD58-E2A0BAFB19F0}" type="datetime1">
               <a:rPr lang="en-US" smtClean="0"/>
-              <a:t>4/5/2026</a:t>
+              <a:t>4/18/2026</a:t>
             </a:fld>
             <a:endParaRPr lang="en-US" dirty="0"/>
           </a:p>
@@ -2768,7 +2768,7 @@
           <a:p>
             <a:fld id="{BCF34A98-A000-48DE-9116-E934FFF27517}" type="datetime1">
               <a:rPr lang="en-US" smtClean="0"/>
-              <a:t>4/5/2026</a:t>
+              <a:t>4/18/2026</a:t>
             </a:fld>
             <a:endParaRPr lang="en-US"/>
           </a:p>
@@ -3018,7 +3018,7 @@
           <a:p>
             <a:fld id="{7FEB8B98-44DB-413F-9109-8A1D80B619A6}" type="datetime1">
               <a:rPr lang="en-US" smtClean="0"/>
-              <a:t>4/5/2026</a:t>
+              <a:t>4/18/2026</a:t>
             </a:fld>
             <a:endParaRPr lang="en-US"/>
           </a:p>
@@ -3254,7 +3254,7 @@
           <a:p>
             <a:fld id="{CEF630F4-3C1F-469E-8BA7-63884D781A93}" type="datetime1">
               <a:rPr lang="en-US" smtClean="0"/>
-              <a:t>4/5/2026</a:t>
+              <a:t>4/18/2026</a:t>
             </a:fld>
             <a:endParaRPr lang="en-US"/>
           </a:p>
@@ -3625,7 +3625,7 @@
           <a:p>
             <a:fld id="{9DAF91F9-7A49-40D3-ABEC-6746B03F43FF}" type="datetime1">
               <a:rPr lang="en-US" smtClean="0"/>
-              <a:t>4/5/2026</a:t>
+              <a:t>4/18/2026</a:t>
             </a:fld>
             <a:endParaRPr lang="en-US"/>
           </a:p>
@@ -3747,7 +3747,7 @@
           <a:p>
             <a:fld id="{15383D2B-013E-4679-A839-483318C58579}" type="datetime1">
               <a:rPr lang="en-US" smtClean="0"/>
-              <a:t>4/5/2026</a:t>
+              <a:t>4/18/2026</a:t>
             </a:fld>
             <a:endParaRPr lang="en-US"/>
           </a:p>
@@ -3846,7 +3846,7 @@
           <a:p>
             <a:fld id="{99EAFD90-5C1A-45BB-B0F9-5D9EAE58BD8C}" type="datetime1">
               <a:rPr lang="en-US" smtClean="0"/>
-              <a:t>4/5/2026</a:t>
+              <a:t>4/18/2026</a:t>
             </a:fld>
             <a:endParaRPr lang="en-US"/>
           </a:p>
@@ -4127,7 +4127,7 @@
           <a:p>
             <a:fld id="{C0EDF97E-1B23-4C53-B64A-004E2203FCF8}" type="datetime1">
               <a:rPr lang="en-US" smtClean="0"/>
-              <a:t>4/5/2026</a:t>
+              <a:t>4/18/2026</a:t>
             </a:fld>
             <a:endParaRPr lang="en-US"/>
           </a:p>
@@ -4344,7 +4344,7 @@
           <a:p>
             <a:fld id="{3D979263-22F0-4F2A-AE40-B7C82C2E3BD2}" type="datetime1">
               <a:rPr lang="en-US" smtClean="0"/>
-              <a:t>4/5/2026</a:t>
+              <a:t>4/18/2026</a:t>
             </a:fld>
             <a:endParaRPr lang="en-US"/>
           </a:p>
@@ -4850,8 +4850,8 @@
         </p:blipFill>
         <p:spPr>
           <a:xfrm>
-            <a:off x="2787813" y="2128511"/>
-            <a:ext cx="6286500" cy="3952875"/>
+            <a:off x="2733359" y="2094271"/>
+            <a:ext cx="6340954" cy="3987115"/>
           </a:xfrm>
           <a:prstGeom prst="roundRect">
             <a:avLst>
@@ -5130,7 +5130,7 @@
           <a:p>
             <a:fld id="{772FF6F6-8051-4845-8B7F-DCDD5B3E9548}" type="datetime1">
               <a:rPr lang="en-US" smtClean="0"/>
-              <a:t>4/5/2026</a:t>
+              <a:t>4/18/2026</a:t>
             </a:fld>
             <a:endParaRPr lang="en-US" dirty="0"/>
           </a:p>
@@ -5827,7 +5827,7 @@
           <a:p>
             <a:fld id="{91BF8256-FAC6-4549-BDE7-57450D683D7E}" type="datetime1">
               <a:rPr lang="en-US" smtClean="0"/>
-              <a:t>4/5/2026</a:t>
+              <a:t>4/18/2026</a:t>
             </a:fld>
             <a:endParaRPr lang="en-US" dirty="0"/>
           </a:p>
@@ -6752,7 +6752,7 @@
           <a:p>
             <a:fld id="{152E0A2C-2BF4-4EFF-A97E-54E93EC736B5}" type="datetime1">
               <a:rPr lang="en-US" smtClean="0"/>
-              <a:t>4/5/2026</a:t>
+              <a:t>4/18/2026</a:t>
             </a:fld>
             <a:endParaRPr lang="en-US" dirty="0"/>
           </a:p>
